--- a/CapstonePresentation.pptx
+++ b/CapstonePresentation.pptx
@@ -29245,13 +29245,13 @@
   <p:clrMapOvr>
     <a:masterClrMapping/>
   </p:clrMapOvr>
-  <mc:AlternateContent xmlns:mc="http://schemas.openxmlformats.org/markup-compatibility/2006">
-    <mc:Choice xmlns:p159="http://schemas.microsoft.com/office/powerpoint/2015/09/main" Requires="p159">
+  <mc:AlternateContent xmlns:mc="http://schemas.openxmlformats.org/markup-compatibility/2006" xmlns:p159="http://schemas.microsoft.com/office/powerpoint/2015/09/main">
+    <mc:Choice Requires="p159">
       <p:transition xmlns:p14="http://schemas.microsoft.com/office/powerpoint/2010/main" spd="slow" p14:dur="2000">
         <p159:morph option="byObject"/>
       </p:transition>
     </mc:Choice>
-    <mc:Fallback>
+    <mc:Fallback xmlns="">
       <p:transition spd="slow">
         <p:fade/>
       </p:transition>
@@ -30362,13 +30362,13 @@
   <p:clrMapOvr>
     <a:masterClrMapping/>
   </p:clrMapOvr>
-  <mc:AlternateContent xmlns:mc="http://schemas.openxmlformats.org/markup-compatibility/2006">
-    <mc:Choice xmlns:p159="http://schemas.microsoft.com/office/powerpoint/2015/09/main" Requires="p159">
+  <mc:AlternateContent xmlns:mc="http://schemas.openxmlformats.org/markup-compatibility/2006" xmlns:p159="http://schemas.microsoft.com/office/powerpoint/2015/09/main">
+    <mc:Choice Requires="p159">
       <p:transition xmlns:p14="http://schemas.microsoft.com/office/powerpoint/2010/main" spd="slow" p14:dur="2000">
         <p159:morph option="byObject"/>
       </p:transition>
     </mc:Choice>
-    <mc:Fallback>
+    <mc:Fallback xmlns="">
       <p:transition spd="slow">
         <p:fade/>
       </p:transition>
@@ -30746,13 +30746,13 @@
   <p:clrMapOvr>
     <a:masterClrMapping/>
   </p:clrMapOvr>
-  <mc:AlternateContent xmlns:mc="http://schemas.openxmlformats.org/markup-compatibility/2006">
-    <mc:Choice xmlns:p159="http://schemas.microsoft.com/office/powerpoint/2015/09/main" Requires="p159">
+  <mc:AlternateContent xmlns:mc="http://schemas.openxmlformats.org/markup-compatibility/2006" xmlns:p159="http://schemas.microsoft.com/office/powerpoint/2015/09/main">
+    <mc:Choice Requires="p159">
       <p:transition xmlns:p14="http://schemas.microsoft.com/office/powerpoint/2010/main" spd="slow" p14:dur="2000">
         <p159:morph option="byObject"/>
       </p:transition>
     </mc:Choice>
-    <mc:Fallback>
+    <mc:Fallback xmlns="">
       <p:transition spd="slow">
         <p:fade/>
       </p:transition>
@@ -31574,13 +31574,13 @@
   <p:clrMapOvr>
     <a:masterClrMapping/>
   </p:clrMapOvr>
-  <mc:AlternateContent xmlns:mc="http://schemas.openxmlformats.org/markup-compatibility/2006">
-    <mc:Choice xmlns:p159="http://schemas.microsoft.com/office/powerpoint/2015/09/main" Requires="p159">
+  <mc:AlternateContent xmlns:mc="http://schemas.openxmlformats.org/markup-compatibility/2006" xmlns:p159="http://schemas.microsoft.com/office/powerpoint/2015/09/main">
+    <mc:Choice Requires="p159">
       <p:transition xmlns:p14="http://schemas.microsoft.com/office/powerpoint/2010/main" spd="slow" p14:dur="2000">
         <p159:morph option="byObject"/>
       </p:transition>
     </mc:Choice>
-    <mc:Fallback>
+    <mc:Fallback xmlns="">
       <p:transition spd="slow">
         <p:fade/>
       </p:transition>
@@ -32028,13 +32028,13 @@
   <p:clrMapOvr>
     <a:masterClrMapping/>
   </p:clrMapOvr>
-  <mc:AlternateContent xmlns:mc="http://schemas.openxmlformats.org/markup-compatibility/2006">
-    <mc:Choice xmlns:p159="http://schemas.microsoft.com/office/powerpoint/2015/09/main" Requires="p159">
+  <mc:AlternateContent xmlns:mc="http://schemas.openxmlformats.org/markup-compatibility/2006" xmlns:p159="http://schemas.microsoft.com/office/powerpoint/2015/09/main">
+    <mc:Choice Requires="p159">
       <p:transition xmlns:p14="http://schemas.microsoft.com/office/powerpoint/2010/main" spd="slow" p14:dur="2000">
         <p159:morph option="byObject"/>
       </p:transition>
     </mc:Choice>
-    <mc:Fallback>
+    <mc:Fallback xmlns="">
       <p:transition spd="slow">
         <p:fade/>
       </p:transition>
@@ -32179,13 +32179,13 @@
   <p:clrMapOvr>
     <a:masterClrMapping/>
   </p:clrMapOvr>
-  <mc:AlternateContent xmlns:mc="http://schemas.openxmlformats.org/markup-compatibility/2006">
-    <mc:Choice xmlns:p159="http://schemas.microsoft.com/office/powerpoint/2015/09/main" Requires="p159">
+  <mc:AlternateContent xmlns:mc="http://schemas.openxmlformats.org/markup-compatibility/2006" xmlns:p159="http://schemas.microsoft.com/office/powerpoint/2015/09/main">
+    <mc:Choice Requires="p159">
       <p:transition xmlns:p14="http://schemas.microsoft.com/office/powerpoint/2010/main" spd="slow" p14:dur="2000">
         <p159:morph option="byObject"/>
       </p:transition>
     </mc:Choice>
-    <mc:Fallback>
+    <mc:Fallback xmlns="">
       <p:transition spd="slow">
         <p:fade/>
       </p:transition>
@@ -32628,13 +32628,13 @@
   <p:clrMapOvr>
     <a:masterClrMapping/>
   </p:clrMapOvr>
-  <mc:AlternateContent xmlns:mc="http://schemas.openxmlformats.org/markup-compatibility/2006">
-    <mc:Choice xmlns:p159="http://schemas.microsoft.com/office/powerpoint/2015/09/main" Requires="p159">
+  <mc:AlternateContent xmlns:mc="http://schemas.openxmlformats.org/markup-compatibility/2006" xmlns:p159="http://schemas.microsoft.com/office/powerpoint/2015/09/main">
+    <mc:Choice Requires="p159">
       <p:transition xmlns:p14="http://schemas.microsoft.com/office/powerpoint/2010/main" spd="slow" p14:dur="2000">
         <p159:morph option="byObject"/>
       </p:transition>
     </mc:Choice>
-    <mc:Fallback>
+    <mc:Fallback xmlns="">
       <p:transition spd="slow">
         <p:fade/>
       </p:transition>
@@ -32995,13 +32995,13 @@
   <p:clrMapOvr>
     <a:masterClrMapping/>
   </p:clrMapOvr>
-  <mc:AlternateContent xmlns:mc="http://schemas.openxmlformats.org/markup-compatibility/2006">
-    <mc:Choice xmlns:p159="http://schemas.microsoft.com/office/powerpoint/2015/09/main" Requires="p159">
+  <mc:AlternateContent xmlns:mc="http://schemas.openxmlformats.org/markup-compatibility/2006" xmlns:p159="http://schemas.microsoft.com/office/powerpoint/2015/09/main">
+    <mc:Choice Requires="p159">
       <p:transition xmlns:p14="http://schemas.microsoft.com/office/powerpoint/2010/main" spd="slow" p14:dur="2000">
         <p159:morph option="byObject"/>
       </p:transition>
     </mc:Choice>
-    <mc:Fallback>
+    <mc:Fallback xmlns="">
       <p:transition spd="slow">
         <p:fade/>
       </p:transition>
@@ -33444,13 +33444,13 @@
   <p:clrMapOvr>
     <a:masterClrMapping/>
   </p:clrMapOvr>
-  <mc:AlternateContent xmlns:mc="http://schemas.openxmlformats.org/markup-compatibility/2006">
-    <mc:Choice xmlns:p159="http://schemas.microsoft.com/office/powerpoint/2015/09/main" Requires="p159">
+  <mc:AlternateContent xmlns:mc="http://schemas.openxmlformats.org/markup-compatibility/2006" xmlns:p159="http://schemas.microsoft.com/office/powerpoint/2015/09/main">
+    <mc:Choice Requires="p159">
       <p:transition xmlns:p14="http://schemas.microsoft.com/office/powerpoint/2010/main" spd="slow" p14:dur="2000">
         <p159:morph option="byObject"/>
       </p:transition>
     </mc:Choice>
-    <mc:Fallback>
+    <mc:Fallback xmlns="">
       <p:transition spd="slow">
         <p:fade/>
       </p:transition>
@@ -33811,13 +33811,13 @@
   <p:clrMapOvr>
     <a:masterClrMapping/>
   </p:clrMapOvr>
-  <mc:AlternateContent xmlns:mc="http://schemas.openxmlformats.org/markup-compatibility/2006">
-    <mc:Choice xmlns:p159="http://schemas.microsoft.com/office/powerpoint/2015/09/main" Requires="p159">
+  <mc:AlternateContent xmlns:mc="http://schemas.openxmlformats.org/markup-compatibility/2006" xmlns:p159="http://schemas.microsoft.com/office/powerpoint/2015/09/main">
+    <mc:Choice Requires="p159">
       <p:transition xmlns:p14="http://schemas.microsoft.com/office/powerpoint/2010/main" spd="slow" p14:dur="2000">
         <p159:morph option="byObject"/>
       </p:transition>
     </mc:Choice>
-    <mc:Fallback>
+    <mc:Fallback xmlns="">
       <p:transition spd="slow">
         <p:fade/>
       </p:transition>
@@ -34269,13 +34269,13 @@
   <p:clrMapOvr>
     <a:masterClrMapping/>
   </p:clrMapOvr>
-  <mc:AlternateContent xmlns:mc="http://schemas.openxmlformats.org/markup-compatibility/2006">
-    <mc:Choice xmlns:p159="http://schemas.microsoft.com/office/powerpoint/2015/09/main" Requires="p159">
+  <mc:AlternateContent xmlns:mc="http://schemas.openxmlformats.org/markup-compatibility/2006" xmlns:p159="http://schemas.microsoft.com/office/powerpoint/2015/09/main">
+    <mc:Choice Requires="p159">
       <p:transition xmlns:p14="http://schemas.microsoft.com/office/powerpoint/2010/main" spd="slow" p14:dur="2000">
         <p159:morph option="byObject"/>
       </p:transition>
     </mc:Choice>
-    <mc:Fallback>
+    <mc:Fallback xmlns="">
       <p:transition spd="slow">
         <p:fade/>
       </p:transition>
@@ -34708,13 +34708,13 @@
   <p:clrMapOvr>
     <a:masterClrMapping/>
   </p:clrMapOvr>
-  <mc:AlternateContent xmlns:mc="http://schemas.openxmlformats.org/markup-compatibility/2006">
-    <mc:Choice xmlns:p159="http://schemas.microsoft.com/office/powerpoint/2015/09/main" Requires="p159">
+  <mc:AlternateContent xmlns:mc="http://schemas.openxmlformats.org/markup-compatibility/2006" xmlns:p159="http://schemas.microsoft.com/office/powerpoint/2015/09/main">
+    <mc:Choice Requires="p159">
       <p:transition xmlns:p14="http://schemas.microsoft.com/office/powerpoint/2010/main" spd="slow" p14:dur="2000">
         <p159:morph option="byObject"/>
       </p:transition>
     </mc:Choice>
-    <mc:Fallback>
+    <mc:Fallback xmlns="">
       <p:transition spd="slow">
         <p:fade/>
       </p:transition>
@@ -34758,7 +34758,7 @@
         </p:nvSpPr>
         <p:spPr>
           <a:xfrm>
-            <a:off x="694944" y="1623377"/>
+            <a:off x="1225294" y="1623377"/>
             <a:ext cx="2157984" cy="557784"/>
           </a:xfrm>
         </p:spPr>
@@ -34810,14 +34810,7 @@
             </a:pPr>
             <a:r>
               <a:rPr lang="en-US" sz="3600" dirty="0"/>
-              <a:t>Are there predictable seasonal</a:t>
-            </a:r>
-            <a:br>
-              <a:rPr lang="en-US" sz="3600" dirty="0"/>
-            </a:br>
-            <a:r>
-              <a:rPr lang="en-US" sz="3600" dirty="0"/>
-              <a:t>trends we can prepare for?</a:t>
+              <a:t>Can the South Region Predict Seasonal Demand?</a:t>
             </a:r>
           </a:p>
         </p:txBody>
@@ -35164,13 +35157,13 @@
   <p:clrMapOvr>
     <a:masterClrMapping/>
   </p:clrMapOvr>
-  <mc:AlternateContent xmlns:mc="http://schemas.openxmlformats.org/markup-compatibility/2006">
-    <mc:Choice xmlns:p159="http://schemas.microsoft.com/office/powerpoint/2015/09/main" Requires="p159">
+  <mc:AlternateContent xmlns:mc="http://schemas.openxmlformats.org/markup-compatibility/2006" xmlns:p159="http://schemas.microsoft.com/office/powerpoint/2015/09/main">
+    <mc:Choice Requires="p159">
       <p:transition xmlns:p14="http://schemas.microsoft.com/office/powerpoint/2010/main" spd="slow" p14:dur="2000">
         <p159:morph option="byObject"/>
       </p:transition>
     </mc:Choice>
-    <mc:Fallback>
+    <mc:Fallback xmlns="">
       <p:transition spd="slow">
         <p:fade/>
       </p:transition>
@@ -35893,13 +35886,13 @@
   <p:clrMapOvr>
     <a:masterClrMapping/>
   </p:clrMapOvr>
-  <mc:AlternateContent xmlns:mc="http://schemas.openxmlformats.org/markup-compatibility/2006">
-    <mc:Choice xmlns:p159="http://schemas.microsoft.com/office/powerpoint/2015/09/main" Requires="p159">
+  <mc:AlternateContent xmlns:mc="http://schemas.openxmlformats.org/markup-compatibility/2006" xmlns:p159="http://schemas.microsoft.com/office/powerpoint/2015/09/main">
+    <mc:Choice Requires="p159">
       <p:transition xmlns:p14="http://schemas.microsoft.com/office/powerpoint/2010/main" spd="slow" p14:dur="2000">
         <p159:morph option="byObject"/>
       </p:transition>
     </mc:Choice>
-    <mc:Fallback>
+    <mc:Fallback xmlns="">
       <p:transition spd="slow">
         <p:fade/>
       </p:transition>
@@ -36300,13 +36293,13 @@
   <p:clrMapOvr>
     <a:masterClrMapping/>
   </p:clrMapOvr>
-  <mc:AlternateContent xmlns:mc="http://schemas.openxmlformats.org/markup-compatibility/2006">
-    <mc:Choice xmlns:p159="http://schemas.microsoft.com/office/powerpoint/2015/09/main" Requires="p159">
+  <mc:AlternateContent xmlns:mc="http://schemas.openxmlformats.org/markup-compatibility/2006" xmlns:p159="http://schemas.microsoft.com/office/powerpoint/2015/09/main">
+    <mc:Choice Requires="p159">
       <p:transition xmlns:p14="http://schemas.microsoft.com/office/powerpoint/2010/main" spd="slow" p14:dur="2000">
         <p159:morph option="byObject"/>
       </p:transition>
     </mc:Choice>
-    <mc:Fallback>
+    <mc:Fallback xmlns="">
       <p:transition spd="slow">
         <p:fade/>
       </p:transition>
@@ -36842,13 +36835,13 @@
   <p:clrMapOvr>
     <a:masterClrMapping/>
   </p:clrMapOvr>
-  <mc:AlternateContent xmlns:mc="http://schemas.openxmlformats.org/markup-compatibility/2006">
-    <mc:Choice xmlns:p159="http://schemas.microsoft.com/office/powerpoint/2015/09/main" Requires="p159">
+  <mc:AlternateContent xmlns:mc="http://schemas.openxmlformats.org/markup-compatibility/2006" xmlns:p159="http://schemas.microsoft.com/office/powerpoint/2015/09/main">
+    <mc:Choice Requires="p159">
       <p:transition xmlns:p14="http://schemas.microsoft.com/office/powerpoint/2010/main" spd="slow" p14:dur="2000">
         <p159:morph option="byObject"/>
       </p:transition>
     </mc:Choice>
-    <mc:Fallback>
+    <mc:Fallback xmlns="">
       <p:transition spd="slow">
         <p:fade/>
       </p:transition>
@@ -37220,13 +37213,13 @@
   <p:clrMapOvr>
     <a:masterClrMapping/>
   </p:clrMapOvr>
-  <mc:AlternateContent xmlns:mc="http://schemas.openxmlformats.org/markup-compatibility/2006">
-    <mc:Choice xmlns:p159="http://schemas.microsoft.com/office/powerpoint/2015/09/main" Requires="p159">
+  <mc:AlternateContent xmlns:mc="http://schemas.openxmlformats.org/markup-compatibility/2006" xmlns:p159="http://schemas.microsoft.com/office/powerpoint/2015/09/main">
+    <mc:Choice Requires="p159">
       <p:transition xmlns:p14="http://schemas.microsoft.com/office/powerpoint/2010/main" spd="slow" p14:dur="2000">
         <p159:morph option="byObject"/>
       </p:transition>
     </mc:Choice>
-    <mc:Fallback>
+    <mc:Fallback xmlns="">
       <p:transition spd="slow">
         <p:fade/>
       </p:transition>
@@ -39020,13 +39013,13 @@
   <p:clrMapOvr>
     <a:masterClrMapping/>
   </p:clrMapOvr>
-  <mc:AlternateContent xmlns:mc="http://schemas.openxmlformats.org/markup-compatibility/2006">
-    <mc:Choice xmlns:p159="http://schemas.microsoft.com/office/powerpoint/2015/09/main" Requires="p159">
+  <mc:AlternateContent xmlns:mc="http://schemas.openxmlformats.org/markup-compatibility/2006" xmlns:p159="http://schemas.microsoft.com/office/powerpoint/2015/09/main">
+    <mc:Choice Requires="p159">
       <p:transition xmlns:p14="http://schemas.microsoft.com/office/powerpoint/2010/main" spd="slow" p14:dur="2000">
         <p159:morph option="byObject"/>
       </p:transition>
     </mc:Choice>
-    <mc:Fallback>
+    <mc:Fallback xmlns="">
       <p:transition spd="slow">
         <p:fade/>
       </p:transition>
@@ -40650,13 +40643,13 @@
   <p:clrMapOvr>
     <a:masterClrMapping/>
   </p:clrMapOvr>
-  <mc:AlternateContent xmlns:mc="http://schemas.openxmlformats.org/markup-compatibility/2006">
-    <mc:Choice xmlns:p159="http://schemas.microsoft.com/office/powerpoint/2015/09/main" Requires="p159">
+  <mc:AlternateContent xmlns:mc="http://schemas.openxmlformats.org/markup-compatibility/2006" xmlns:p159="http://schemas.microsoft.com/office/powerpoint/2015/09/main">
+    <mc:Choice Requires="p159">
       <p:transition xmlns:p14="http://schemas.microsoft.com/office/powerpoint/2010/main" spd="slow" p14:dur="2000">
         <p159:morph option="byObject"/>
       </p:transition>
     </mc:Choice>
-    <mc:Fallback>
+    <mc:Fallback xmlns="">
       <p:transition spd="slow">
         <p:fade/>
       </p:transition>
@@ -42109,13 +42102,13 @@
   <p:clrMapOvr>
     <a:masterClrMapping/>
   </p:clrMapOvr>
-  <mc:AlternateContent xmlns:mc="http://schemas.openxmlformats.org/markup-compatibility/2006">
-    <mc:Choice xmlns:p159="http://schemas.microsoft.com/office/powerpoint/2015/09/main" Requires="p159">
+  <mc:AlternateContent xmlns:mc="http://schemas.openxmlformats.org/markup-compatibility/2006" xmlns:p159="http://schemas.microsoft.com/office/powerpoint/2015/09/main">
+    <mc:Choice Requires="p159">
       <p:transition xmlns:p14="http://schemas.microsoft.com/office/powerpoint/2010/main" spd="slow" p14:dur="2000">
         <p159:morph option="byObject"/>
       </p:transition>
     </mc:Choice>
-    <mc:Fallback>
+    <mc:Fallback xmlns="">
       <p:transition spd="slow">
         <p:fade/>
       </p:transition>
@@ -43397,13 +43390,13 @@
   <p:clrMapOvr>
     <a:masterClrMapping/>
   </p:clrMapOvr>
-  <mc:AlternateContent xmlns:mc="http://schemas.openxmlformats.org/markup-compatibility/2006">
-    <mc:Choice xmlns:p159="http://schemas.microsoft.com/office/powerpoint/2015/09/main" Requires="p159">
+  <mc:AlternateContent xmlns:mc="http://schemas.openxmlformats.org/markup-compatibility/2006" xmlns:p159="http://schemas.microsoft.com/office/powerpoint/2015/09/main">
+    <mc:Choice Requires="p159">
       <p:transition xmlns:p14="http://schemas.microsoft.com/office/powerpoint/2010/main" spd="slow" p14:dur="2000">
         <p159:morph option="byObject"/>
       </p:transition>
     </mc:Choice>
-    <mc:Fallback>
+    <mc:Fallback xmlns="">
       <p:transition spd="slow">
         <p:fade/>
       </p:transition>
@@ -44264,20 +44257,20 @@
 </file>
 
 <file path=customXml/item1.xml><?xml version="1.0" encoding="utf-8"?>
+<p:properties xmlns:p="http://schemas.microsoft.com/office/2006/metadata/properties" xmlns:xsi="http://www.w3.org/2001/XMLSchema-instance" xmlns:pc="http://schemas.microsoft.com/office/infopath/2007/PartnerControls">
+  <documentManagement>
+    <_activity xmlns="b275f972-a0ec-44ed-acfc-93b347ca42d1" xsi:nil="true"/>
+  </documentManagement>
+</p:properties>
+</file>
+
+<file path=customXml/item2.xml><?xml version="1.0" encoding="utf-8"?>
 <?mso-contentType ?>
 <FormTemplates xmlns="http://schemas.microsoft.com/sharepoint/v3/contenttype/forms">
   <Display>DocumentLibraryForm</Display>
   <Edit>DocumentLibraryForm</Edit>
   <New>DocumentLibraryForm</New>
 </FormTemplates>
-</file>
-
-<file path=customXml/item2.xml><?xml version="1.0" encoding="utf-8"?>
-<p:properties xmlns:p="http://schemas.microsoft.com/office/2006/metadata/properties" xmlns:xsi="http://www.w3.org/2001/XMLSchema-instance" xmlns:pc="http://schemas.microsoft.com/office/infopath/2007/PartnerControls">
-  <documentManagement>
-    <_activity xmlns="b275f972-a0ec-44ed-acfc-93b347ca42d1" xsi:nil="true"/>
-  </documentManagement>
-</p:properties>
 </file>
 
 <file path=customXml/item3.xml><?xml version="1.0" encoding="utf-8"?>
@@ -44455,14 +44448,6 @@
 </file>
 
 <file path=customXml/itemProps1.xml><?xml version="1.0" encoding="utf-8"?>
-<ds:datastoreItem xmlns:ds="http://schemas.openxmlformats.org/officeDocument/2006/customXml" ds:itemID="{55E72E99-0076-433E-AD3A-575A11FAB73D}">
-  <ds:schemaRefs>
-    <ds:schemaRef ds:uri="http://schemas.microsoft.com/sharepoint/v3/contenttype/forms"/>
-  </ds:schemaRefs>
-</ds:datastoreItem>
-</file>
-
-<file path=customXml/itemProps2.xml><?xml version="1.0" encoding="utf-8"?>
 <ds:datastoreItem xmlns:ds="http://schemas.openxmlformats.org/officeDocument/2006/customXml" ds:itemID="{7B247F30-5811-40C0-99EC-CF53200590BE}">
   <ds:schemaRefs>
     <ds:schemaRef ds:uri="http://purl.org/dc/terms/"/>
@@ -44474,6 +44459,14 @@
     <ds:schemaRef ds:uri="http://schemas.microsoft.com/office/2006/documentManagement/types"/>
     <ds:schemaRef ds:uri="http://schemas.openxmlformats.org/package/2006/metadata/core-properties"/>
     <ds:schemaRef ds:uri="http://purl.org/dc/dcmitype/"/>
+  </ds:schemaRefs>
+</ds:datastoreItem>
+</file>
+
+<file path=customXml/itemProps2.xml><?xml version="1.0" encoding="utf-8"?>
+<ds:datastoreItem xmlns:ds="http://schemas.openxmlformats.org/officeDocument/2006/customXml" ds:itemID="{55E72E99-0076-433E-AD3A-575A11FAB73D}">
+  <ds:schemaRefs>
+    <ds:schemaRef ds:uri="http://schemas.microsoft.com/sharepoint/v3/contenttype/forms"/>
   </ds:schemaRefs>
 </ds:datastoreItem>
 </file>
